--- a/Science_Complete_Course_SagarSir/01_Physics_भौतिक_विज्ञान/Class_04_Sound_Waves_HumanEar.pptx
+++ b/Science_Complete_Course_SagarSir/01_Physics_भौतिक_विज्ञान/Class_04_Sound_Waves_HumanEar.pptx
@@ -3553,7 +3553,7 @@
               </a:defRPr>
             </a:pPr>
             <a:r>
-              <a:t>मार्गदर्शक: सागर सर (NMMS King)  |  Helpline / WhatsApp: +91 91101 13671  |  Website: sagarcoaching.tech</a:t>
+              <a:t>मार्गदर्शक: सागर सर (NMMS King)  |  Website: sagarcoaching.tech</a:t>
             </a:r>
           </a:p>
         </p:txBody>
@@ -3725,7 +3725,7 @@
               </a:defRPr>
             </a:pPr>
             <a:r>
-              <a:t>WhatsApp / Helpline: +91 91101 13671  |  वेबसाइट: sagarcoaching.tech  |  Slide 10 of 37</a:t>
+              <a:t>वेबसाइट: sagarcoaching.tech  |  Slide 10 of 37</a:t>
             </a:r>
           </a:p>
         </p:txBody>
@@ -4243,7 +4243,7 @@
               </a:defRPr>
             </a:pPr>
             <a:r>
-              <a:t>WhatsApp / Helpline: +91 91101 13671  |  वेबसाइट: sagarcoaching.tech  |  Slide 11 of 37</a:t>
+              <a:t>वेबसाइट: sagarcoaching.tech  |  Slide 11 of 37</a:t>
             </a:r>
           </a:p>
         </p:txBody>
@@ -4690,7 +4690,7 @@
               </a:defRPr>
             </a:pPr>
             <a:r>
-              <a:t>WhatsApp / Helpline: +91 91101 13671  |  वेबसाइट: sagarcoaching.tech  |  Slide 12 of 37</a:t>
+              <a:t>वेबसाइट: sagarcoaching.tech  |  Slide 12 of 37</a:t>
             </a:r>
           </a:p>
         </p:txBody>
@@ -5208,7 +5208,7 @@
               </a:defRPr>
             </a:pPr>
             <a:r>
-              <a:t>WhatsApp / Helpline: +91 91101 13671  |  वेबसाइट: sagarcoaching.tech  |  Slide 13 of 37</a:t>
+              <a:t>वेबसाइट: sagarcoaching.tech  |  Slide 13 of 37</a:t>
             </a:r>
           </a:p>
         </p:txBody>
@@ -5655,7 +5655,7 @@
               </a:defRPr>
             </a:pPr>
             <a:r>
-              <a:t>WhatsApp / Helpline: +91 91101 13671  |  वेबसाइट: sagarcoaching.tech  |  Slide 14 of 37</a:t>
+              <a:t>वेबसाइट: sagarcoaching.tech  |  Slide 14 of 37</a:t>
             </a:r>
           </a:p>
         </p:txBody>
@@ -6173,7 +6173,7 @@
               </a:defRPr>
             </a:pPr>
             <a:r>
-              <a:t>WhatsApp / Helpline: +91 91101 13671  |  वेबसाइट: sagarcoaching.tech  |  Slide 15 of 37</a:t>
+              <a:t>वेबसाइट: sagarcoaching.tech  |  Slide 15 of 37</a:t>
             </a:r>
           </a:p>
         </p:txBody>
@@ -6620,7 +6620,7 @@
               </a:defRPr>
             </a:pPr>
             <a:r>
-              <a:t>WhatsApp / Helpline: +91 91101 13671  |  वेबसाइट: sagarcoaching.tech  |  Slide 16 of 37</a:t>
+              <a:t>वेबसाइट: sagarcoaching.tech  |  Slide 16 of 37</a:t>
             </a:r>
           </a:p>
         </p:txBody>
@@ -7138,7 +7138,7 @@
               </a:defRPr>
             </a:pPr>
             <a:r>
-              <a:t>WhatsApp / Helpline: +91 91101 13671  |  वेबसाइट: sagarcoaching.tech  |  Slide 17 of 37</a:t>
+              <a:t>वेबसाइट: sagarcoaching.tech  |  Slide 17 of 37</a:t>
             </a:r>
           </a:p>
         </p:txBody>
@@ -7585,7 +7585,7 @@
               </a:defRPr>
             </a:pPr>
             <a:r>
-              <a:t>WhatsApp / Helpline: +91 91101 13671  |  वेबसाइट: sagarcoaching.tech  |  Slide 18 of 37</a:t>
+              <a:t>वेबसाइट: sagarcoaching.tech  |  Slide 18 of 37</a:t>
             </a:r>
           </a:p>
         </p:txBody>
@@ -8103,7 +8103,7 @@
               </a:defRPr>
             </a:pPr>
             <a:r>
-              <a:t>WhatsApp / Helpline: +91 91101 13671  |  वेबसाइट: sagarcoaching.tech  |  Slide 19 of 37</a:t>
+              <a:t>वेबसाइट: sagarcoaching.tech  |  Slide 19 of 37</a:t>
             </a:r>
           </a:p>
         </p:txBody>
@@ -8550,7 +8550,7 @@
               </a:defRPr>
             </a:pPr>
             <a:r>
-              <a:t>WhatsApp / Helpline: +91 91101 13671  |  वेबसाइट: sagarcoaching.tech  |  Slide 2 of 37</a:t>
+              <a:t>वेबसाइट: sagarcoaching.tech  |  Slide 2 of 37</a:t>
             </a:r>
           </a:p>
         </p:txBody>
@@ -8929,7 +8929,7 @@
               </a:defRPr>
             </a:pPr>
             <a:r>
-              <a:t>WhatsApp / Helpline: +91 91101 13671  |  वेबसाइट: sagarcoaching.tech  |  Slide 20 of 37</a:t>
+              <a:t>वेबसाइट: sagarcoaching.tech  |  Slide 20 of 37</a:t>
             </a:r>
           </a:p>
         </p:txBody>
@@ -9447,7 +9447,7 @@
               </a:defRPr>
             </a:pPr>
             <a:r>
-              <a:t>WhatsApp / Helpline: +91 91101 13671  |  वेबसाइट: sagarcoaching.tech  |  Slide 21 of 37</a:t>
+              <a:t>वेबसाइट: sagarcoaching.tech  |  Slide 21 of 37</a:t>
             </a:r>
           </a:p>
         </p:txBody>
@@ -9894,7 +9894,7 @@
               </a:defRPr>
             </a:pPr>
             <a:r>
-              <a:t>WhatsApp / Helpline: +91 91101 13671  |  वेबसाइट: sagarcoaching.tech  |  Slide 22 of 37</a:t>
+              <a:t>वेबसाइट: sagarcoaching.tech  |  Slide 22 of 37</a:t>
             </a:r>
           </a:p>
         </p:txBody>
@@ -10412,7 +10412,7 @@
               </a:defRPr>
             </a:pPr>
             <a:r>
-              <a:t>WhatsApp / Helpline: +91 91101 13671  |  वेबसाइट: sagarcoaching.tech  |  Slide 23 of 37</a:t>
+              <a:t>वेबसाइट: sagarcoaching.tech  |  Slide 23 of 37</a:t>
             </a:r>
           </a:p>
         </p:txBody>
@@ -10859,7 +10859,7 @@
               </a:defRPr>
             </a:pPr>
             <a:r>
-              <a:t>WhatsApp / Helpline: +91 91101 13671  |  वेबसाइट: sagarcoaching.tech  |  Slide 24 of 37</a:t>
+              <a:t>वेबसाइट: sagarcoaching.tech  |  Slide 24 of 37</a:t>
             </a:r>
           </a:p>
         </p:txBody>
@@ -11377,7 +11377,7 @@
               </a:defRPr>
             </a:pPr>
             <a:r>
-              <a:t>WhatsApp / Helpline: +91 91101 13671  |  वेबसाइट: sagarcoaching.tech  |  Slide 25 of 37</a:t>
+              <a:t>वेबसाइट: sagarcoaching.tech  |  Slide 25 of 37</a:t>
             </a:r>
           </a:p>
         </p:txBody>
@@ -11824,7 +11824,7 @@
               </a:defRPr>
             </a:pPr>
             <a:r>
-              <a:t>WhatsApp / Helpline: +91 91101 13671  |  वेबसाइट: sagarcoaching.tech  |  Slide 26 of 37</a:t>
+              <a:t>वेबसाइट: sagarcoaching.tech  |  Slide 26 of 37</a:t>
             </a:r>
           </a:p>
         </p:txBody>
@@ -12342,7 +12342,7 @@
               </a:defRPr>
             </a:pPr>
             <a:r>
-              <a:t>WhatsApp / Helpline: +91 91101 13671  |  वेबसाइट: sagarcoaching.tech  |  Slide 27 of 37</a:t>
+              <a:t>वेबसाइट: sagarcoaching.tech  |  Slide 27 of 37</a:t>
             </a:r>
           </a:p>
         </p:txBody>
@@ -12789,7 +12789,7 @@
               </a:defRPr>
             </a:pPr>
             <a:r>
-              <a:t>WhatsApp / Helpline: +91 91101 13671  |  वेबसाइट: sagarcoaching.tech  |  Slide 28 of 37</a:t>
+              <a:t>वेबसाइट: sagarcoaching.tech  |  Slide 28 of 37</a:t>
             </a:r>
           </a:p>
         </p:txBody>
@@ -13307,7 +13307,7 @@
               </a:defRPr>
             </a:pPr>
             <a:r>
-              <a:t>WhatsApp / Helpline: +91 91101 13671  |  वेबसाइट: sagarcoaching.tech  |  Slide 29 of 37</a:t>
+              <a:t>वेबसाइट: sagarcoaching.tech  |  Slide 29 of 37</a:t>
             </a:r>
           </a:p>
         </p:txBody>
@@ -13754,7 +13754,7 @@
               </a:defRPr>
             </a:pPr>
             <a:r>
-              <a:t>WhatsApp / Helpline: +91 91101 13671  |  वेबसाइट: sagarcoaching.tech  |  Slide 3 of 37</a:t>
+              <a:t>वेबसाइट: sagarcoaching.tech  |  Slide 3 of 37</a:t>
             </a:r>
           </a:p>
         </p:txBody>
@@ -14114,7 +14114,7 @@
               </a:defRPr>
             </a:pPr>
             <a:r>
-              <a:t>WhatsApp / Helpline: +91 91101 13671  |  वेबसाइट: sagarcoaching.tech  |  Slide 30 of 37</a:t>
+              <a:t>वेबसाइट: sagarcoaching.tech  |  Slide 30 of 37</a:t>
             </a:r>
           </a:p>
         </p:txBody>
@@ -14632,7 +14632,7 @@
               </a:defRPr>
             </a:pPr>
             <a:r>
-              <a:t>WhatsApp / Helpline: +91 91101 13671  |  वेबसाइट: sagarcoaching.tech  |  Slide 31 of 37</a:t>
+              <a:t>वेबसाइट: sagarcoaching.tech  |  Slide 31 of 37</a:t>
             </a:r>
           </a:p>
         </p:txBody>
@@ -15079,7 +15079,7 @@
               </a:defRPr>
             </a:pPr>
             <a:r>
-              <a:t>WhatsApp / Helpline: +91 91101 13671  |  वेबसाइट: sagarcoaching.tech  |  Slide 32 of 37</a:t>
+              <a:t>वेबसाइट: sagarcoaching.tech  |  Slide 32 of 37</a:t>
             </a:r>
           </a:p>
         </p:txBody>
@@ -15597,7 +15597,7 @@
               </a:defRPr>
             </a:pPr>
             <a:r>
-              <a:t>WhatsApp / Helpline: +91 91101 13671  |  वेबसाइट: sagarcoaching.tech  |  Slide 33 of 37</a:t>
+              <a:t>वेबसाइट: sagarcoaching.tech  |  Slide 33 of 37</a:t>
             </a:r>
           </a:p>
         </p:txBody>
@@ -16044,7 +16044,7 @@
               </a:defRPr>
             </a:pPr>
             <a:r>
-              <a:t>WhatsApp / Helpline: +91 91101 13671  |  वेबसाइट: sagarcoaching.tech  |  Slide 34 of 37</a:t>
+              <a:t>वेबसाइट: sagarcoaching.tech  |  Slide 34 of 37</a:t>
             </a:r>
           </a:p>
         </p:txBody>
@@ -16562,7 +16562,7 @@
               </a:defRPr>
             </a:pPr>
             <a:r>
-              <a:t>WhatsApp / Helpline: +91 91101 13671  |  वेबसाइट: sagarcoaching.tech  |  Slide 35 of 37</a:t>
+              <a:t>वेबसाइट: sagarcoaching.tech  |  Slide 35 of 37</a:t>
             </a:r>
           </a:p>
         </p:txBody>
@@ -16903,7 +16903,7 @@
               </a:defRPr>
             </a:pPr>
             <a:r>
-              <a:t>WhatsApp / Helpline: +91 91101 13671  |  वेबसाइट: sagarcoaching.tech  |  Slide 36 of 37</a:t>
+              <a:t>वेबसाइट: sagarcoaching.tech  |  Slide 36 of 37</a:t>
             </a:r>
           </a:p>
         </p:txBody>
@@ -17296,7 +17296,7 @@
               </a:defRPr>
             </a:pPr>
             <a:r>
-              <a:t>इस क्लास की PDF डाउनलोड करें: sagarcoaching.tech | Helpline: +91 91101 13671</a:t>
+              <a:t>इस क्लास की PDF डाउनलोड करें: sagarcoaching.tech</a:t>
             </a:r>
           </a:p>
         </p:txBody>
@@ -17451,7 +17451,7 @@
               </a:defRPr>
             </a:pPr>
             <a:r>
-              <a:t>मार्गदर्शक: सागर सर (NMMS King)  |  Helpline / WhatsApp: +91 91101 13671  |  Website: sagarcoaching.tech</a:t>
+              <a:t>मार्गदर्शक: सागर सर (NMMS King)  |  Website: sagarcoaching.tech</a:t>
             </a:r>
           </a:p>
         </p:txBody>
@@ -17623,7 +17623,7 @@
               </a:defRPr>
             </a:pPr>
             <a:r>
-              <a:t>WhatsApp / Helpline: +91 91101 13671  |  वेबसाइट: sagarcoaching.tech  |  Slide 4 of 37</a:t>
+              <a:t>वेबसाइट: sagarcoaching.tech  |  Slide 4 of 37</a:t>
             </a:r>
           </a:p>
         </p:txBody>
@@ -17945,7 +17945,7 @@
               </a:defRPr>
             </a:pPr>
             <a:r>
-              <a:t>WhatsApp / Helpline: +91 91101 13671  |  वेबसाइट: sagarcoaching.tech  |  Slide 5 of 37</a:t>
+              <a:t>वेबसाइट: sagarcoaching.tech  |  Slide 5 of 37</a:t>
             </a:r>
           </a:p>
         </p:txBody>
@@ -18392,7 +18392,7 @@
               </a:defRPr>
             </a:pPr>
             <a:r>
-              <a:t>WhatsApp / Helpline: +91 91101 13671  |  वेबसाइट: sagarcoaching.tech  |  Slide 6 of 37</a:t>
+              <a:t>वेबसाइट: sagarcoaching.tech  |  Slide 6 of 37</a:t>
             </a:r>
           </a:p>
         </p:txBody>
@@ -18910,7 +18910,7 @@
               </a:defRPr>
             </a:pPr>
             <a:r>
-              <a:t>WhatsApp / Helpline: +91 91101 13671  |  वेबसाइट: sagarcoaching.tech  |  Slide 7 of 37</a:t>
+              <a:t>वेबसाइट: sagarcoaching.tech  |  Slide 7 of 37</a:t>
             </a:r>
           </a:p>
         </p:txBody>
@@ -19357,7 +19357,7 @@
               </a:defRPr>
             </a:pPr>
             <a:r>
-              <a:t>WhatsApp / Helpline: +91 91101 13671  |  वेबसाइट: sagarcoaching.tech  |  Slide 8 of 37</a:t>
+              <a:t>वेबसाइट: sagarcoaching.tech  |  Slide 8 of 37</a:t>
             </a:r>
           </a:p>
         </p:txBody>
@@ -19875,7 +19875,7 @@
               </a:defRPr>
             </a:pPr>
             <a:r>
-              <a:t>WhatsApp / Helpline: +91 91101 13671  |  वेबसाइट: sagarcoaching.tech  |  Slide 9 of 37</a:t>
+              <a:t>वेबसाइट: sagarcoaching.tech  |  Slide 9 of 37</a:t>
             </a:r>
           </a:p>
         </p:txBody>
